--- a/Module 2 topic 2/t2-lesson3-perpendicular-slopes-catchup.pptx
+++ b/Module 2 topic 2/t2-lesson3-perpendicular-slopes-catchup.pptx
@@ -2957,6 +2957,40 @@
           </a:p>
         </p:txBody>
       </p:sp>
+      <p:sp>
+        <p:nvSpPr>
+          <p:cNvPr id="9" name="Slide Number 9"/>
+          <p:cNvSpPr txBox="1"/>
+          <p:nvPr/>
+        </p:nvSpPr>
+        <p:spPr>
+          <a:xfrm>
+            <a:off x="11277295" y="6611112"/>
+            <a:ext cx="685800" cy="201168"/>
+          </a:xfrm>
+          <a:prstGeom prst="rect">
+            <a:avLst/>
+          </a:prstGeom>
+          <a:noFill/>
+        </p:spPr>
+        <p:txBody>
+          <a:bodyPr wrap="none" lIns="0" tIns="0" rIns="0" bIns="0" anchor="b">
+            <a:noAutofit/>
+          </a:bodyPr>
+          <a:lstStyle/>
+          <a:p>
+            <a:pPr algn="r"/>
+            <a:fld id="{5C1A6E0B-3B1F-4D5E-9C7A-2F4B8D6E1A90}" type="slidenum">
+              <a:rPr lang="en-US" sz="1200" dirty="0">
+                <a:solidFill>
+                  <a:srgbClr val="5F6272"/>
+                </a:solidFill>
+              </a:rPr>
+              <a:t>1</a:t>
+            </a:fld>
+          </a:p>
+        </p:txBody>
+      </p:sp>
     </p:spTree>
   </p:cSld>
   <p:clrMapOvr>
@@ -3158,6 +3192,40 @@
               <a:t xml:space="preserve">2. Identify and write the equations of horizontal and vertical lines.</a:t>
             </a:r>
             <a:endParaRPr lang="en-US" sz="1950" dirty="0"/>
+          </a:p>
+        </p:txBody>
+      </p:sp>
+      <p:sp>
+        <p:nvSpPr>
+          <p:cNvPr id="6" name="Slide Number 6"/>
+          <p:cNvSpPr txBox="1"/>
+          <p:nvPr/>
+        </p:nvSpPr>
+        <p:spPr>
+          <a:xfrm>
+            <a:off x="11277295" y="6611112"/>
+            <a:ext cx="685800" cy="201168"/>
+          </a:xfrm>
+          <a:prstGeom prst="rect">
+            <a:avLst/>
+          </a:prstGeom>
+          <a:noFill/>
+        </p:spPr>
+        <p:txBody>
+          <a:bodyPr wrap="none" lIns="0" tIns="0" rIns="0" bIns="0" anchor="b">
+            <a:noAutofit/>
+          </a:bodyPr>
+          <a:lstStyle/>
+          <a:p>
+            <a:pPr algn="r"/>
+            <a:fld id="{5C1A6E0B-3B1F-4D5E-9C7A-2F4B8D6E1A90}" type="slidenum">
+              <a:rPr lang="en-US" sz="1200" dirty="0">
+                <a:solidFill>
+                  <a:srgbClr val="5F6272"/>
+                </a:solidFill>
+              </a:rPr>
+              <a:t>10</a:t>
+            </a:fld>
           </a:p>
         </p:txBody>
       </p:sp>
@@ -3549,6 +3617,40 @@
           </a:p>
         </p:txBody>
       </p:sp>
+      <p:sp>
+        <p:nvSpPr>
+          <p:cNvPr id="5" name="Slide Number 5"/>
+          <p:cNvSpPr txBox="1"/>
+          <p:nvPr/>
+        </p:nvSpPr>
+        <p:spPr>
+          <a:xfrm>
+            <a:off x="11277295" y="6611112"/>
+            <a:ext cx="685800" cy="201168"/>
+          </a:xfrm>
+          <a:prstGeom prst="rect">
+            <a:avLst/>
+          </a:prstGeom>
+          <a:noFill/>
+        </p:spPr>
+        <p:txBody>
+          <a:bodyPr wrap="none" lIns="0" tIns="0" rIns="0" bIns="0" anchor="b">
+            <a:noAutofit/>
+          </a:bodyPr>
+          <a:lstStyle/>
+          <a:p>
+            <a:pPr algn="r"/>
+            <a:fld id="{5C1A6E0B-3B1F-4D5E-9C7A-2F4B8D6E1A90}" type="slidenum">
+              <a:rPr lang="en-US" sz="1200" dirty="0">
+                <a:solidFill>
+                  <a:srgbClr val="5F6272"/>
+                </a:solidFill>
+              </a:rPr>
+              <a:t>11</a:t>
+            </a:fld>
+          </a:p>
+        </p:txBody>
+      </p:sp>
     </p:spTree>
   </p:cSld>
   <p:clrMapOvr>
@@ -7190,6 +7292,40 @@
           </a:p>
         </p:txBody>
       </p:sp>
+      <p:sp>
+        <p:nvSpPr>
+          <p:cNvPr id="95" name="Slide Number 95"/>
+          <p:cNvSpPr txBox="1"/>
+          <p:nvPr/>
+        </p:nvSpPr>
+        <p:spPr>
+          <a:xfrm>
+            <a:off x="11277295" y="6611112"/>
+            <a:ext cx="685800" cy="201168"/>
+          </a:xfrm>
+          <a:prstGeom prst="rect">
+            <a:avLst/>
+          </a:prstGeom>
+          <a:noFill/>
+        </p:spPr>
+        <p:txBody>
+          <a:bodyPr wrap="none" lIns="0" tIns="0" rIns="0" bIns="0" anchor="b">
+            <a:noAutofit/>
+          </a:bodyPr>
+          <a:lstStyle/>
+          <a:p>
+            <a:pPr algn="r"/>
+            <a:fld id="{5C1A6E0B-3B1F-4D5E-9C7A-2F4B8D6E1A90}" type="slidenum">
+              <a:rPr lang="en-US" sz="1200" dirty="0">
+                <a:solidFill>
+                  <a:srgbClr val="5F6272"/>
+                </a:solidFill>
+              </a:rPr>
+              <a:t>12</a:t>
+            </a:fld>
+          </a:p>
+        </p:txBody>
+      </p:sp>
     </p:spTree>
   </p:cSld>
   <p:clrMapOvr>
@@ -9251,6 +9387,40 @@
               <a:t xml:space="preserve">The slopes of each pair are reciprocals with opposite signs.</a:t>
             </a:r>
             <a:endParaRPr lang="en-US" sz="1575" dirty="0"/>
+          </a:p>
+        </p:txBody>
+      </p:sp>
+      <p:sp>
+        <p:nvSpPr>
+          <p:cNvPr id="18" name="Slide Number 18"/>
+          <p:cNvSpPr txBox="1"/>
+          <p:nvPr/>
+        </p:nvSpPr>
+        <p:spPr>
+          <a:xfrm>
+            <a:off x="11277295" y="6611112"/>
+            <a:ext cx="685800" cy="201168"/>
+          </a:xfrm>
+          <a:prstGeom prst="rect">
+            <a:avLst/>
+          </a:prstGeom>
+          <a:noFill/>
+        </p:spPr>
+        <p:txBody>
+          <a:bodyPr wrap="none" lIns="0" tIns="0" rIns="0" bIns="0" anchor="b">
+            <a:noAutofit/>
+          </a:bodyPr>
+          <a:lstStyle/>
+          <a:p>
+            <a:pPr algn="r"/>
+            <a:fld id="{5C1A6E0B-3B1F-4D5E-9C7A-2F4B8D6E1A90}" type="slidenum">
+              <a:rPr lang="en-US" sz="1200" dirty="0">
+                <a:solidFill>
+                  <a:srgbClr val="5F6272"/>
+                </a:solidFill>
+              </a:rPr>
+              <a:t>13</a:t>
+            </a:fld>
           </a:p>
         </p:txBody>
       </p:sp>
@@ -12734,6 +12904,40 @@
           </a:p>
         </p:txBody>
       </p:sp>
+      <p:sp>
+        <p:nvSpPr>
+          <p:cNvPr id="60" name="Slide Number 60"/>
+          <p:cNvSpPr txBox="1"/>
+          <p:nvPr/>
+        </p:nvSpPr>
+        <p:spPr>
+          <a:xfrm>
+            <a:off x="11277295" y="6611112"/>
+            <a:ext cx="685800" cy="201168"/>
+          </a:xfrm>
+          <a:prstGeom prst="rect">
+            <a:avLst/>
+          </a:prstGeom>
+          <a:noFill/>
+        </p:spPr>
+        <p:txBody>
+          <a:bodyPr wrap="none" lIns="0" tIns="0" rIns="0" bIns="0" anchor="b">
+            <a:noAutofit/>
+          </a:bodyPr>
+          <a:lstStyle/>
+          <a:p>
+            <a:pPr algn="r"/>
+            <a:fld id="{5C1A6E0B-3B1F-4D5E-9C7A-2F4B8D6E1A90}" type="slidenum">
+              <a:rPr lang="en-US" sz="1200" dirty="0">
+                <a:solidFill>
+                  <a:srgbClr val="5F6272"/>
+                </a:solidFill>
+              </a:rPr>
+              <a:t>14</a:t>
+            </a:fld>
+          </a:p>
+        </p:txBody>
+      </p:sp>
     </p:spTree>
   </p:cSld>
   <p:clrMapOvr>
@@ -13806,6 +14010,40 @@
           </a:p>
         </p:txBody>
       </p:sp>
+      <p:sp>
+        <p:nvSpPr>
+          <p:cNvPr id="11" name="Slide Number 11"/>
+          <p:cNvSpPr txBox="1"/>
+          <p:nvPr/>
+        </p:nvSpPr>
+        <p:spPr>
+          <a:xfrm>
+            <a:off x="11277295" y="6611112"/>
+            <a:ext cx="685800" cy="201168"/>
+          </a:xfrm>
+          <a:prstGeom prst="rect">
+            <a:avLst/>
+          </a:prstGeom>
+          <a:noFill/>
+        </p:spPr>
+        <p:txBody>
+          <a:bodyPr wrap="none" lIns="0" tIns="0" rIns="0" bIns="0" anchor="b">
+            <a:noAutofit/>
+          </a:bodyPr>
+          <a:lstStyle/>
+          <a:p>
+            <a:pPr algn="r"/>
+            <a:fld id="{5C1A6E0B-3B1F-4D5E-9C7A-2F4B8D6E1A90}" type="slidenum">
+              <a:rPr lang="en-US" sz="1200" dirty="0">
+                <a:solidFill>
+                  <a:srgbClr val="5F6272"/>
+                </a:solidFill>
+              </a:rPr>
+              <a:t>15</a:t>
+            </a:fld>
+          </a:p>
+        </p:txBody>
+      </p:sp>
     </p:spTree>
   </p:cSld>
   <p:clrMapOvr>
@@ -14392,6 +14630,40 @@
           </a:p>
         </p:txBody>
       </p:sp>
+      <p:sp>
+        <p:nvSpPr>
+          <p:cNvPr id="5" name="Slide Number 5"/>
+          <p:cNvSpPr txBox="1"/>
+          <p:nvPr/>
+        </p:nvSpPr>
+        <p:spPr>
+          <a:xfrm>
+            <a:off x="11277295" y="6611112"/>
+            <a:ext cx="685800" cy="201168"/>
+          </a:xfrm>
+          <a:prstGeom prst="rect">
+            <a:avLst/>
+          </a:prstGeom>
+          <a:noFill/>
+        </p:spPr>
+        <p:txBody>
+          <a:bodyPr wrap="none" lIns="0" tIns="0" rIns="0" bIns="0" anchor="b">
+            <a:noAutofit/>
+          </a:bodyPr>
+          <a:lstStyle/>
+          <a:p>
+            <a:pPr algn="r"/>
+            <a:fld id="{5C1A6E0B-3B1F-4D5E-9C7A-2F4B8D6E1A90}" type="slidenum">
+              <a:rPr lang="en-US" sz="1200" dirty="0">
+                <a:solidFill>
+                  <a:srgbClr val="5F6272"/>
+                </a:solidFill>
+              </a:rPr>
+              <a:t>16</a:t>
+            </a:fld>
+          </a:p>
+        </p:txBody>
+      </p:sp>
     </p:spTree>
   </p:cSld>
   <p:clrMapOvr>
@@ -14593,6 +14865,40 @@
               <a:t xml:space="preserve">Essential Question: How can you rotate the graphs of linear equations to determine the slopes of perpendicular lines?</a:t>
             </a:r>
             <a:endParaRPr lang="en-US" sz="2400" dirty="0"/>
+          </a:p>
+        </p:txBody>
+      </p:sp>
+      <p:sp>
+        <p:nvSpPr>
+          <p:cNvPr id="6" name="Slide Number 6"/>
+          <p:cNvSpPr txBox="1"/>
+          <p:nvPr/>
+        </p:nvSpPr>
+        <p:spPr>
+          <a:xfrm>
+            <a:off x="11277295" y="6611112"/>
+            <a:ext cx="685800" cy="201168"/>
+          </a:xfrm>
+          <a:prstGeom prst="rect">
+            <a:avLst/>
+          </a:prstGeom>
+          <a:noFill/>
+        </p:spPr>
+        <p:txBody>
+          <a:bodyPr wrap="none" lIns="0" tIns="0" rIns="0" bIns="0" anchor="b">
+            <a:noAutofit/>
+          </a:bodyPr>
+          <a:lstStyle/>
+          <a:p>
+            <a:pPr algn="r"/>
+            <a:fld id="{5C1A6E0B-3B1F-4D5E-9C7A-2F4B8D6E1A90}" type="slidenum">
+              <a:rPr lang="en-US" sz="1200" dirty="0">
+                <a:solidFill>
+                  <a:srgbClr val="5F6272"/>
+                </a:solidFill>
+              </a:rPr>
+              <a:t>17</a:t>
+            </a:fld>
           </a:p>
         </p:txBody>
       </p:sp>
@@ -15399,6 +15705,40 @@
           </a:p>
         </p:txBody>
       </p:sp>
+      <p:sp>
+        <p:nvSpPr>
+          <p:cNvPr id="12" name="Slide Number 12"/>
+          <p:cNvSpPr txBox="1"/>
+          <p:nvPr/>
+        </p:nvSpPr>
+        <p:spPr>
+          <a:xfrm>
+            <a:off x="11277295" y="6611112"/>
+            <a:ext cx="685800" cy="201168"/>
+          </a:xfrm>
+          <a:prstGeom prst="rect">
+            <a:avLst/>
+          </a:prstGeom>
+          <a:noFill/>
+        </p:spPr>
+        <p:txBody>
+          <a:bodyPr wrap="none" lIns="0" tIns="0" rIns="0" bIns="0" anchor="b">
+            <a:noAutofit/>
+          </a:bodyPr>
+          <a:lstStyle/>
+          <a:p>
+            <a:pPr algn="r"/>
+            <a:fld id="{5C1A6E0B-3B1F-4D5E-9C7A-2F4B8D6E1A90}" type="slidenum">
+              <a:rPr lang="en-US" sz="1200" dirty="0">
+                <a:solidFill>
+                  <a:srgbClr val="5F6272"/>
+                </a:solidFill>
+              </a:rPr>
+              <a:t>18</a:t>
+            </a:fld>
+          </a:p>
+        </p:txBody>
+      </p:sp>
     </p:spTree>
   </p:cSld>
   <p:clrMapOvr>
@@ -16061,6 +16401,40 @@
           </a:p>
         </p:txBody>
       </p:sp>
+      <p:sp>
+        <p:nvSpPr>
+          <p:cNvPr id="6" name="Slide Number 6"/>
+          <p:cNvSpPr txBox="1"/>
+          <p:nvPr/>
+        </p:nvSpPr>
+        <p:spPr>
+          <a:xfrm>
+            <a:off x="11277295" y="6611112"/>
+            <a:ext cx="685800" cy="201168"/>
+          </a:xfrm>
+          <a:prstGeom prst="rect">
+            <a:avLst/>
+          </a:prstGeom>
+          <a:noFill/>
+        </p:spPr>
+        <p:txBody>
+          <a:bodyPr wrap="none" lIns="0" tIns="0" rIns="0" bIns="0" anchor="b">
+            <a:noAutofit/>
+          </a:bodyPr>
+          <a:lstStyle/>
+          <a:p>
+            <a:pPr algn="r"/>
+            <a:fld id="{5C1A6E0B-3B1F-4D5E-9C7A-2F4B8D6E1A90}" type="slidenum">
+              <a:rPr lang="en-US" sz="1200" dirty="0">
+                <a:solidFill>
+                  <a:srgbClr val="5F6272"/>
+                </a:solidFill>
+              </a:rPr>
+              <a:t>19</a:t>
+            </a:fld>
+          </a:p>
+        </p:txBody>
+      </p:sp>
     </p:spTree>
   </p:cSld>
   <p:clrMapOvr>
@@ -16221,6 +16595,40 @@
           </a:p>
         </p:txBody>
       </p:sp>
+      <p:sp>
+        <p:nvSpPr>
+          <p:cNvPr id="5" name="Slide Number 5"/>
+          <p:cNvSpPr txBox="1"/>
+          <p:nvPr/>
+        </p:nvSpPr>
+        <p:spPr>
+          <a:xfrm>
+            <a:off x="11277295" y="6611112"/>
+            <a:ext cx="685800" cy="201168"/>
+          </a:xfrm>
+          <a:prstGeom prst="rect">
+            <a:avLst/>
+          </a:prstGeom>
+          <a:noFill/>
+        </p:spPr>
+        <p:txBody>
+          <a:bodyPr wrap="none" lIns="0" tIns="0" rIns="0" bIns="0" anchor="b">
+            <a:noAutofit/>
+          </a:bodyPr>
+          <a:lstStyle/>
+          <a:p>
+            <a:pPr algn="r"/>
+            <a:fld id="{5C1A6E0B-3B1F-4D5E-9C7A-2F4B8D6E1A90}" type="slidenum">
+              <a:rPr lang="en-US" sz="1200" dirty="0">
+                <a:solidFill>
+                  <a:srgbClr val="5F6272"/>
+                </a:solidFill>
+              </a:rPr>
+              <a:t>2</a:t>
+            </a:fld>
+          </a:p>
+        </p:txBody>
+      </p:sp>
     </p:spTree>
   </p:cSld>
   <p:clrMapOvr>
@@ -18660,6 +19068,40 @@
               <a:t xml:space="preserve">G(t)</a:t>
             </a:r>
             <a:endParaRPr lang="en-US" sz="1275" dirty="0"/>
+          </a:p>
+        </p:txBody>
+      </p:sp>
+      <p:sp>
+        <p:nvSpPr>
+          <p:cNvPr id="78" name="Slide Number 78"/>
+          <p:cNvSpPr txBox="1"/>
+          <p:nvPr/>
+        </p:nvSpPr>
+        <p:spPr>
+          <a:xfrm>
+            <a:off x="11277295" y="6611112"/>
+            <a:ext cx="685800" cy="201168"/>
+          </a:xfrm>
+          <a:prstGeom prst="rect">
+            <a:avLst/>
+          </a:prstGeom>
+          <a:noFill/>
+        </p:spPr>
+        <p:txBody>
+          <a:bodyPr wrap="none" lIns="0" tIns="0" rIns="0" bIns="0" anchor="b">
+            <a:noAutofit/>
+          </a:bodyPr>
+          <a:lstStyle/>
+          <a:p>
+            <a:pPr algn="r"/>
+            <a:fld id="{5C1A6E0B-3B1F-4D5E-9C7A-2F4B8D6E1A90}" type="slidenum">
+              <a:rPr lang="en-US" sz="1200" dirty="0">
+                <a:solidFill>
+                  <a:srgbClr val="5F6272"/>
+                </a:solidFill>
+              </a:rPr>
+              <a:t>20</a:t>
+            </a:fld>
           </a:p>
         </p:txBody>
       </p:sp>
@@ -20324,6 +20766,40 @@
           </a:p>
         </p:txBody>
       </p:sp>
+      <p:sp>
+        <p:nvSpPr>
+          <p:cNvPr id="17" name="Slide Number 17"/>
+          <p:cNvSpPr txBox="1"/>
+          <p:nvPr/>
+        </p:nvSpPr>
+        <p:spPr>
+          <a:xfrm>
+            <a:off x="11277295" y="6611112"/>
+            <a:ext cx="685800" cy="201168"/>
+          </a:xfrm>
+          <a:prstGeom prst="rect">
+            <a:avLst/>
+          </a:prstGeom>
+          <a:noFill/>
+        </p:spPr>
+        <p:txBody>
+          <a:bodyPr wrap="none" lIns="0" tIns="0" rIns="0" bIns="0" anchor="b">
+            <a:noAutofit/>
+          </a:bodyPr>
+          <a:lstStyle/>
+          <a:p>
+            <a:pPr algn="r"/>
+            <a:fld id="{5C1A6E0B-3B1F-4D5E-9C7A-2F4B8D6E1A90}" type="slidenum">
+              <a:rPr lang="en-US" sz="1200" dirty="0">
+                <a:solidFill>
+                  <a:srgbClr val="5F6272"/>
+                </a:solidFill>
+              </a:rPr>
+              <a:t>21</a:t>
+            </a:fld>
+          </a:p>
+        </p:txBody>
+      </p:sp>
     </p:spTree>
   </p:cSld>
   <p:clrMapOvr>
@@ -22018,6 +22494,40 @@
           </a:ln>
         </p:spPr>
       </p:cxnSp>
+      <p:sp>
+        <p:nvSpPr>
+          <p:cNvPr id="32" name="Slide Number 32"/>
+          <p:cNvSpPr txBox="1"/>
+          <p:nvPr/>
+        </p:nvSpPr>
+        <p:spPr>
+          <a:xfrm>
+            <a:off x="11277295" y="6611112"/>
+            <a:ext cx="685800" cy="201168"/>
+          </a:xfrm>
+          <a:prstGeom prst="rect">
+            <a:avLst/>
+          </a:prstGeom>
+          <a:noFill/>
+        </p:spPr>
+        <p:txBody>
+          <a:bodyPr wrap="none" lIns="0" tIns="0" rIns="0" bIns="0" anchor="b">
+            <a:noAutofit/>
+          </a:bodyPr>
+          <a:lstStyle/>
+          <a:p>
+            <a:pPr algn="r"/>
+            <a:fld id="{5C1A6E0B-3B1F-4D5E-9C7A-2F4B8D6E1A90}" type="slidenum">
+              <a:rPr lang="en-US" sz="1200" dirty="0">
+                <a:solidFill>
+                  <a:srgbClr val="5F6272"/>
+                </a:solidFill>
+              </a:rPr>
+              <a:t>22</a:t>
+            </a:fld>
+          </a:p>
+        </p:txBody>
+      </p:sp>
     </p:spTree>
   </p:cSld>
   <p:clrMapOvr>
@@ -24260,6 +24770,40 @@
           </a:p>
         </p:txBody>
       </p:sp>
+      <p:sp>
+        <p:nvSpPr>
+          <p:cNvPr id="5" name="Slide Number 5"/>
+          <p:cNvSpPr txBox="1"/>
+          <p:nvPr/>
+        </p:nvSpPr>
+        <p:spPr>
+          <a:xfrm>
+            <a:off x="11277295" y="6611112"/>
+            <a:ext cx="685800" cy="201168"/>
+          </a:xfrm>
+          <a:prstGeom prst="rect">
+            <a:avLst/>
+          </a:prstGeom>
+          <a:noFill/>
+        </p:spPr>
+        <p:txBody>
+          <a:bodyPr wrap="none" lIns="0" tIns="0" rIns="0" bIns="0" anchor="b">
+            <a:noAutofit/>
+          </a:bodyPr>
+          <a:lstStyle/>
+          <a:p>
+            <a:pPr algn="r"/>
+            <a:fld id="{5C1A6E0B-3B1F-4D5E-9C7A-2F4B8D6E1A90}" type="slidenum">
+              <a:rPr lang="en-US" sz="1200" dirty="0">
+                <a:solidFill>
+                  <a:srgbClr val="5F6272"/>
+                </a:solidFill>
+              </a:rPr>
+              <a:t>23</a:t>
+            </a:fld>
+          </a:p>
+        </p:txBody>
+      </p:sp>
     </p:spTree>
   </p:cSld>
   <p:clrMapOvr>
@@ -27153,6 +27697,40 @@
               <a:t xml:space="preserve">H</a:t>
             </a:r>
             <a:endParaRPr lang="en-US" sz="1125" dirty="0"/>
+          </a:p>
+        </p:txBody>
+      </p:sp>
+      <p:sp>
+        <p:nvSpPr>
+          <p:cNvPr id="82" name="Slide Number 82"/>
+          <p:cNvSpPr txBox="1"/>
+          <p:nvPr/>
+        </p:nvSpPr>
+        <p:spPr>
+          <a:xfrm>
+            <a:off x="11277295" y="6611112"/>
+            <a:ext cx="685800" cy="201168"/>
+          </a:xfrm>
+          <a:prstGeom prst="rect">
+            <a:avLst/>
+          </a:prstGeom>
+          <a:noFill/>
+        </p:spPr>
+        <p:txBody>
+          <a:bodyPr wrap="none" lIns="0" tIns="0" rIns="0" bIns="0" anchor="b">
+            <a:noAutofit/>
+          </a:bodyPr>
+          <a:lstStyle/>
+          <a:p>
+            <a:pPr algn="r"/>
+            <a:fld id="{5C1A6E0B-3B1F-4D5E-9C7A-2F4B8D6E1A90}" type="slidenum">
+              <a:rPr lang="en-US" sz="1200" dirty="0">
+                <a:solidFill>
+                  <a:srgbClr val="5F6272"/>
+                </a:solidFill>
+              </a:rPr>
+              <a:t>24</a:t>
+            </a:fld>
           </a:p>
         </p:txBody>
       </p:sp>
@@ -28660,6 +29238,40 @@
               <a:t xml:space="preserve"> = 5</a:t>
             </a:r>
             <a:endParaRPr lang="en-US" sz="2325" dirty="0"/>
+          </a:p>
+        </p:txBody>
+      </p:sp>
+      <p:sp>
+        <p:nvSpPr>
+          <p:cNvPr id="16" name="Slide Number 16"/>
+          <p:cNvSpPr txBox="1"/>
+          <p:nvPr/>
+        </p:nvSpPr>
+        <p:spPr>
+          <a:xfrm>
+            <a:off x="11277295" y="6611112"/>
+            <a:ext cx="685800" cy="201168"/>
+          </a:xfrm>
+          <a:prstGeom prst="rect">
+            <a:avLst/>
+          </a:prstGeom>
+          <a:noFill/>
+        </p:spPr>
+        <p:txBody>
+          <a:bodyPr wrap="none" lIns="0" tIns="0" rIns="0" bIns="0" anchor="b">
+            <a:noAutofit/>
+          </a:bodyPr>
+          <a:lstStyle/>
+          <a:p>
+            <a:pPr algn="r"/>
+            <a:fld id="{5C1A6E0B-3B1F-4D5E-9C7A-2F4B8D6E1A90}" type="slidenum">
+              <a:rPr lang="en-US" sz="1200" dirty="0">
+                <a:solidFill>
+                  <a:srgbClr val="5F6272"/>
+                </a:solidFill>
+              </a:rPr>
+              <a:t>25</a:t>
+            </a:fld>
           </a:p>
         </p:txBody>
       </p:sp>
@@ -29985,6 +30597,40 @@
           </a:p>
         </p:txBody>
       </p:sp>
+      <p:sp>
+        <p:nvSpPr>
+          <p:cNvPr id="10" name="Slide Number 10"/>
+          <p:cNvSpPr txBox="1"/>
+          <p:nvPr/>
+        </p:nvSpPr>
+        <p:spPr>
+          <a:xfrm>
+            <a:off x="11277295" y="6611112"/>
+            <a:ext cx="685800" cy="201168"/>
+          </a:xfrm>
+          <a:prstGeom prst="rect">
+            <a:avLst/>
+          </a:prstGeom>
+          <a:noFill/>
+        </p:spPr>
+        <p:txBody>
+          <a:bodyPr wrap="none" lIns="0" tIns="0" rIns="0" bIns="0" anchor="b">
+            <a:noAutofit/>
+          </a:bodyPr>
+          <a:lstStyle/>
+          <a:p>
+            <a:pPr algn="r"/>
+            <a:fld id="{5C1A6E0B-3B1F-4D5E-9C7A-2F4B8D6E1A90}" type="slidenum">
+              <a:rPr lang="en-US" sz="1200" dirty="0">
+                <a:solidFill>
+                  <a:srgbClr val="5F6272"/>
+                </a:solidFill>
+              </a:rPr>
+              <a:t>26</a:t>
+            </a:fld>
+          </a:p>
+        </p:txBody>
+      </p:sp>
     </p:spTree>
   </p:cSld>
   <p:clrMapOvr>
@@ -31265,6 +31911,40 @@
           </a:p>
         </p:txBody>
       </p:sp>
+      <p:sp>
+        <p:nvSpPr>
+          <p:cNvPr id="13" name="Slide Number 13"/>
+          <p:cNvSpPr txBox="1"/>
+          <p:nvPr/>
+        </p:nvSpPr>
+        <p:spPr>
+          <a:xfrm>
+            <a:off x="11277295" y="6611112"/>
+            <a:ext cx="685800" cy="201168"/>
+          </a:xfrm>
+          <a:prstGeom prst="rect">
+            <a:avLst/>
+          </a:prstGeom>
+          <a:noFill/>
+        </p:spPr>
+        <p:txBody>
+          <a:bodyPr wrap="none" lIns="0" tIns="0" rIns="0" bIns="0" anchor="b">
+            <a:noAutofit/>
+          </a:bodyPr>
+          <a:lstStyle/>
+          <a:p>
+            <a:pPr algn="r"/>
+            <a:fld id="{5C1A6E0B-3B1F-4D5E-9C7A-2F4B8D6E1A90}" type="slidenum">
+              <a:rPr lang="en-US" sz="1200" dirty="0">
+                <a:solidFill>
+                  <a:srgbClr val="5F6272"/>
+                </a:solidFill>
+              </a:rPr>
+              <a:t>27</a:t>
+            </a:fld>
+          </a:p>
+        </p:txBody>
+      </p:sp>
     </p:spTree>
   </p:cSld>
   <p:clrMapOvr>
@@ -32521,6 +33201,40 @@
           </a:p>
         </p:txBody>
       </p:sp>
+      <p:sp>
+        <p:nvSpPr>
+          <p:cNvPr id="8" name="Slide Number 8"/>
+          <p:cNvSpPr txBox="1"/>
+          <p:nvPr/>
+        </p:nvSpPr>
+        <p:spPr>
+          <a:xfrm>
+            <a:off x="11277295" y="6611112"/>
+            <a:ext cx="685800" cy="201168"/>
+          </a:xfrm>
+          <a:prstGeom prst="rect">
+            <a:avLst/>
+          </a:prstGeom>
+          <a:noFill/>
+        </p:spPr>
+        <p:txBody>
+          <a:bodyPr wrap="none" lIns="0" tIns="0" rIns="0" bIns="0" anchor="b">
+            <a:noAutofit/>
+          </a:bodyPr>
+          <a:lstStyle/>
+          <a:p>
+            <a:pPr algn="r"/>
+            <a:fld id="{5C1A6E0B-3B1F-4D5E-9C7A-2F4B8D6E1A90}" type="slidenum">
+              <a:rPr lang="en-US" sz="1200" dirty="0">
+                <a:solidFill>
+                  <a:srgbClr val="5F6272"/>
+                </a:solidFill>
+              </a:rPr>
+              <a:t>28</a:t>
+            </a:fld>
+          </a:p>
+        </p:txBody>
+      </p:sp>
     </p:spTree>
   </p:cSld>
   <p:clrMapOvr>
@@ -33326,6 +34040,40 @@
           </a:p>
         </p:txBody>
       </p:sp>
+      <p:sp>
+        <p:nvSpPr>
+          <p:cNvPr id="7" name="Slide Number 7"/>
+          <p:cNvSpPr txBox="1"/>
+          <p:nvPr/>
+        </p:nvSpPr>
+        <p:spPr>
+          <a:xfrm>
+            <a:off x="11277295" y="6611112"/>
+            <a:ext cx="685800" cy="201168"/>
+          </a:xfrm>
+          <a:prstGeom prst="rect">
+            <a:avLst/>
+          </a:prstGeom>
+          <a:noFill/>
+        </p:spPr>
+        <p:txBody>
+          <a:bodyPr wrap="none" lIns="0" tIns="0" rIns="0" bIns="0" anchor="b">
+            <a:noAutofit/>
+          </a:bodyPr>
+          <a:lstStyle/>
+          <a:p>
+            <a:pPr algn="r"/>
+            <a:fld id="{5C1A6E0B-3B1F-4D5E-9C7A-2F4B8D6E1A90}" type="slidenum">
+              <a:rPr lang="en-US" sz="1200" dirty="0">
+                <a:solidFill>
+                  <a:srgbClr val="5F6272"/>
+                </a:solidFill>
+              </a:rPr>
+              <a:t>29</a:t>
+            </a:fld>
+          </a:p>
+        </p:txBody>
+      </p:sp>
     </p:spTree>
   </p:cSld>
   <p:clrMapOvr>
@@ -34327,6 +35075,40 @@
           </a:p>
         </p:txBody>
       </p:sp>
+      <p:sp>
+        <p:nvSpPr>
+          <p:cNvPr id="12" name="Slide Number 12"/>
+          <p:cNvSpPr txBox="1"/>
+          <p:nvPr/>
+        </p:nvSpPr>
+        <p:spPr>
+          <a:xfrm>
+            <a:off x="11277295" y="6611112"/>
+            <a:ext cx="685800" cy="201168"/>
+          </a:xfrm>
+          <a:prstGeom prst="rect">
+            <a:avLst/>
+          </a:prstGeom>
+          <a:noFill/>
+        </p:spPr>
+        <p:txBody>
+          <a:bodyPr wrap="none" lIns="0" tIns="0" rIns="0" bIns="0" anchor="b">
+            <a:noAutofit/>
+          </a:bodyPr>
+          <a:lstStyle/>
+          <a:p>
+            <a:pPr algn="r"/>
+            <a:fld id="{5C1A6E0B-3B1F-4D5E-9C7A-2F4B8D6E1A90}" type="slidenum">
+              <a:rPr lang="en-US" sz="1200" dirty="0">
+                <a:solidFill>
+                  <a:srgbClr val="5F6272"/>
+                </a:solidFill>
+              </a:rPr>
+              <a:t>3</a:t>
+            </a:fld>
+          </a:p>
+        </p:txBody>
+      </p:sp>
     </p:spTree>
   </p:cSld>
   <p:clrMapOvr>
@@ -35325,6 +36107,40 @@
           </a:p>
         </p:txBody>
       </p:sp>
+      <p:sp>
+        <p:nvSpPr>
+          <p:cNvPr id="10" name="Slide Number 10"/>
+          <p:cNvSpPr txBox="1"/>
+          <p:nvPr/>
+        </p:nvSpPr>
+        <p:spPr>
+          <a:xfrm>
+            <a:off x="11277295" y="6611112"/>
+            <a:ext cx="685800" cy="201168"/>
+          </a:xfrm>
+          <a:prstGeom prst="rect">
+            <a:avLst/>
+          </a:prstGeom>
+          <a:noFill/>
+        </p:spPr>
+        <p:txBody>
+          <a:bodyPr wrap="none" lIns="0" tIns="0" rIns="0" bIns="0" anchor="b">
+            <a:noAutofit/>
+          </a:bodyPr>
+          <a:lstStyle/>
+          <a:p>
+            <a:pPr algn="r"/>
+            <a:fld id="{5C1A6E0B-3B1F-4D5E-9C7A-2F4B8D6E1A90}" type="slidenum">
+              <a:rPr lang="en-US" sz="1200" dirty="0">
+                <a:solidFill>
+                  <a:srgbClr val="5F6272"/>
+                </a:solidFill>
+              </a:rPr>
+              <a:t>30</a:t>
+            </a:fld>
+          </a:p>
+        </p:txBody>
+      </p:sp>
     </p:spTree>
   </p:cSld>
   <p:clrMapOvr>
@@ -35812,6 +36628,40 @@
           </a:p>
         </p:txBody>
       </p:sp>
+      <p:sp>
+        <p:nvSpPr>
+          <p:cNvPr id="5" name="Slide Number 5"/>
+          <p:cNvSpPr txBox="1"/>
+          <p:nvPr/>
+        </p:nvSpPr>
+        <p:spPr>
+          <a:xfrm>
+            <a:off x="11277295" y="6611112"/>
+            <a:ext cx="685800" cy="201168"/>
+          </a:xfrm>
+          <a:prstGeom prst="rect">
+            <a:avLst/>
+          </a:prstGeom>
+          <a:noFill/>
+        </p:spPr>
+        <p:txBody>
+          <a:bodyPr wrap="none" lIns="0" tIns="0" rIns="0" bIns="0" anchor="b">
+            <a:noAutofit/>
+          </a:bodyPr>
+          <a:lstStyle/>
+          <a:p>
+            <a:pPr algn="r"/>
+            <a:fld id="{5C1A6E0B-3B1F-4D5E-9C7A-2F4B8D6E1A90}" type="slidenum">
+              <a:rPr lang="en-US" sz="1200" dirty="0">
+                <a:solidFill>
+                  <a:srgbClr val="5F6272"/>
+                </a:solidFill>
+              </a:rPr>
+              <a:t>31</a:t>
+            </a:fld>
+          </a:p>
+        </p:txBody>
+      </p:sp>
     </p:spTree>
   </p:cSld>
   <p:clrMapOvr>
@@ -36333,6 +37183,40 @@
               <a:t xml:space="preserve">Not a function</a:t>
             </a:r>
             <a:endParaRPr lang="en-US" sz="2325" dirty="0"/>
+          </a:p>
+        </p:txBody>
+      </p:sp>
+      <p:sp>
+        <p:nvSpPr>
+          <p:cNvPr id="12" name="Slide Number 12"/>
+          <p:cNvSpPr txBox="1"/>
+          <p:nvPr/>
+        </p:nvSpPr>
+        <p:spPr>
+          <a:xfrm>
+            <a:off x="11277295" y="6611112"/>
+            <a:ext cx="685800" cy="201168"/>
+          </a:xfrm>
+          <a:prstGeom prst="rect">
+            <a:avLst/>
+          </a:prstGeom>
+          <a:noFill/>
+        </p:spPr>
+        <p:txBody>
+          <a:bodyPr wrap="none" lIns="0" tIns="0" rIns="0" bIns="0" anchor="b">
+            <a:noAutofit/>
+          </a:bodyPr>
+          <a:lstStyle/>
+          <a:p>
+            <a:pPr algn="r"/>
+            <a:fld id="{5C1A6E0B-3B1F-4D5E-9C7A-2F4B8D6E1A90}" type="slidenum">
+              <a:rPr lang="en-US" sz="1200" dirty="0">
+                <a:solidFill>
+                  <a:srgbClr val="5F6272"/>
+                </a:solidFill>
+              </a:rPr>
+              <a:t>32</a:t>
+            </a:fld>
           </a:p>
         </p:txBody>
       </p:sp>
@@ -37374,6 +38258,40 @@
           </a:p>
         </p:txBody>
       </p:sp>
+      <p:sp>
+        <p:nvSpPr>
+          <p:cNvPr id="15" name="Slide Number 15"/>
+          <p:cNvSpPr txBox="1"/>
+          <p:nvPr/>
+        </p:nvSpPr>
+        <p:spPr>
+          <a:xfrm>
+            <a:off x="11277295" y="6611112"/>
+            <a:ext cx="685800" cy="201168"/>
+          </a:xfrm>
+          <a:prstGeom prst="rect">
+            <a:avLst/>
+          </a:prstGeom>
+          <a:noFill/>
+        </p:spPr>
+        <p:txBody>
+          <a:bodyPr wrap="none" lIns="0" tIns="0" rIns="0" bIns="0" anchor="b">
+            <a:noAutofit/>
+          </a:bodyPr>
+          <a:lstStyle/>
+          <a:p>
+            <a:pPr algn="r"/>
+            <a:fld id="{5C1A6E0B-3B1F-4D5E-9C7A-2F4B8D6E1A90}" type="slidenum">
+              <a:rPr lang="en-US" sz="1200" dirty="0">
+                <a:solidFill>
+                  <a:srgbClr val="5F6272"/>
+                </a:solidFill>
+              </a:rPr>
+              <a:t>33</a:t>
+            </a:fld>
+          </a:p>
+        </p:txBody>
+      </p:sp>
     </p:spTree>
   </p:cSld>
   <p:clrMapOvr>
@@ -37610,6 +38528,40 @@
           </a:p>
         </p:txBody>
       </p:sp>
+      <p:sp>
+        <p:nvSpPr>
+          <p:cNvPr id="6" name="Slide Number 6"/>
+          <p:cNvSpPr txBox="1"/>
+          <p:nvPr/>
+        </p:nvSpPr>
+        <p:spPr>
+          <a:xfrm>
+            <a:off x="11277295" y="6611112"/>
+            <a:ext cx="685800" cy="201168"/>
+          </a:xfrm>
+          <a:prstGeom prst="rect">
+            <a:avLst/>
+          </a:prstGeom>
+          <a:noFill/>
+        </p:spPr>
+        <p:txBody>
+          <a:bodyPr wrap="none" lIns="0" tIns="0" rIns="0" bIns="0" anchor="b">
+            <a:noAutofit/>
+          </a:bodyPr>
+          <a:lstStyle/>
+          <a:p>
+            <a:pPr algn="r"/>
+            <a:fld id="{5C1A6E0B-3B1F-4D5E-9C7A-2F4B8D6E1A90}" type="slidenum">
+              <a:rPr lang="en-US" sz="1200" dirty="0">
+                <a:solidFill>
+                  <a:srgbClr val="5F6272"/>
+                </a:solidFill>
+              </a:rPr>
+              <a:t>4</a:t>
+            </a:fld>
+          </a:p>
+        </p:txBody>
+      </p:sp>
     </p:spTree>
   </p:cSld>
   <p:clrMapOvr>
@@ -39602,6 +40554,40 @@
               <a:t xml:space="preserve">(4, 60)</a:t>
             </a:r>
             <a:endParaRPr lang="en-US" sz="1125" dirty="0"/>
+          </a:p>
+        </p:txBody>
+      </p:sp>
+      <p:sp>
+        <p:nvSpPr>
+          <p:cNvPr id="71" name="Slide Number 71"/>
+          <p:cNvSpPr txBox="1"/>
+          <p:nvPr/>
+        </p:nvSpPr>
+        <p:spPr>
+          <a:xfrm>
+            <a:off x="11277295" y="6611112"/>
+            <a:ext cx="685800" cy="201168"/>
+          </a:xfrm>
+          <a:prstGeom prst="rect">
+            <a:avLst/>
+          </a:prstGeom>
+          <a:noFill/>
+        </p:spPr>
+        <p:txBody>
+          <a:bodyPr wrap="none" lIns="0" tIns="0" rIns="0" bIns="0" anchor="b">
+            <a:noAutofit/>
+          </a:bodyPr>
+          <a:lstStyle/>
+          <a:p>
+            <a:pPr algn="r"/>
+            <a:fld id="{5C1A6E0B-3B1F-4D5E-9C7A-2F4B8D6E1A90}" type="slidenum">
+              <a:rPr lang="en-US" sz="1200" dirty="0">
+                <a:solidFill>
+                  <a:srgbClr val="5F6272"/>
+                </a:solidFill>
+              </a:rPr>
+              <a:t>5</a:t>
+            </a:fld>
           </a:p>
         </p:txBody>
       </p:sp>
@@ -41074,6 +42060,40 @@
           </a:p>
         </p:txBody>
       </p:sp>
+      <p:sp>
+        <p:nvSpPr>
+          <p:cNvPr id="20" name="Slide Number 20"/>
+          <p:cNvSpPr txBox="1"/>
+          <p:nvPr/>
+        </p:nvSpPr>
+        <p:spPr>
+          <a:xfrm>
+            <a:off x="11277295" y="6611112"/>
+            <a:ext cx="685800" cy="201168"/>
+          </a:xfrm>
+          <a:prstGeom prst="rect">
+            <a:avLst/>
+          </a:prstGeom>
+          <a:noFill/>
+        </p:spPr>
+        <p:txBody>
+          <a:bodyPr wrap="none" lIns="0" tIns="0" rIns="0" bIns="0" anchor="b">
+            <a:noAutofit/>
+          </a:bodyPr>
+          <a:lstStyle/>
+          <a:p>
+            <a:pPr algn="r"/>
+            <a:fld id="{5C1A6E0B-3B1F-4D5E-9C7A-2F4B8D6E1A90}" type="slidenum">
+              <a:rPr lang="en-US" sz="1200" dirty="0">
+                <a:solidFill>
+                  <a:srgbClr val="5F6272"/>
+                </a:solidFill>
+              </a:rPr>
+              <a:t>6</a:t>
+            </a:fld>
+          </a:p>
+        </p:txBody>
+      </p:sp>
     </p:spTree>
   </p:cSld>
   <p:clrMapOvr>
@@ -42922,6 +43942,40 @@
           </a:p>
         </p:txBody>
       </p:sp>
+      <p:sp>
+        <p:nvSpPr>
+          <p:cNvPr id="12" name="Slide Number 12"/>
+          <p:cNvSpPr txBox="1"/>
+          <p:nvPr/>
+        </p:nvSpPr>
+        <p:spPr>
+          <a:xfrm>
+            <a:off x="11277295" y="6611112"/>
+            <a:ext cx="685800" cy="201168"/>
+          </a:xfrm>
+          <a:prstGeom prst="rect">
+            <a:avLst/>
+          </a:prstGeom>
+          <a:noFill/>
+        </p:spPr>
+        <p:txBody>
+          <a:bodyPr wrap="none" lIns="0" tIns="0" rIns="0" bIns="0" anchor="b">
+            <a:noAutofit/>
+          </a:bodyPr>
+          <a:lstStyle/>
+          <a:p>
+            <a:pPr algn="r"/>
+            <a:fld id="{5C1A6E0B-3B1F-4D5E-9C7A-2F4B8D6E1A90}" type="slidenum">
+              <a:rPr lang="en-US" sz="1200" dirty="0">
+                <a:solidFill>
+                  <a:srgbClr val="5F6272"/>
+                </a:solidFill>
+              </a:rPr>
+              <a:t>7</a:t>
+            </a:fld>
+          </a:p>
+        </p:txBody>
+      </p:sp>
     </p:spTree>
   </p:cSld>
   <p:clrMapOvr>
@@ -45672,6 +46726,40 @@
           </a:p>
         </p:txBody>
       </p:sp>
+      <p:sp>
+        <p:nvSpPr>
+          <p:cNvPr id="74" name="Slide Number 74"/>
+          <p:cNvSpPr txBox="1"/>
+          <p:nvPr/>
+        </p:nvSpPr>
+        <p:spPr>
+          <a:xfrm>
+            <a:off x="11277295" y="6611112"/>
+            <a:ext cx="685800" cy="201168"/>
+          </a:xfrm>
+          <a:prstGeom prst="rect">
+            <a:avLst/>
+          </a:prstGeom>
+          <a:noFill/>
+        </p:spPr>
+        <p:txBody>
+          <a:bodyPr wrap="none" lIns="0" tIns="0" rIns="0" bIns="0" anchor="b">
+            <a:noAutofit/>
+          </a:bodyPr>
+          <a:lstStyle/>
+          <a:p>
+            <a:pPr algn="r"/>
+            <a:fld id="{5C1A6E0B-3B1F-4D5E-9C7A-2F4B8D6E1A90}" type="slidenum">
+              <a:rPr lang="en-US" sz="1200" dirty="0">
+                <a:solidFill>
+                  <a:srgbClr val="5F6272"/>
+                </a:solidFill>
+              </a:rPr>
+              <a:t>8</a:t>
+            </a:fld>
+          </a:p>
+        </p:txBody>
+      </p:sp>
     </p:spTree>
   </p:cSld>
   <p:clrMapOvr>
@@ -46156,6 +47244,40 @@
               <a:t xml:space="preserve">Catch-up done. Now today's Topic 2 lesson.</a:t>
             </a:r>
             <a:endParaRPr lang="en-US" sz="2250" dirty="0"/>
+          </a:p>
+        </p:txBody>
+      </p:sp>
+      <p:sp>
+        <p:nvSpPr>
+          <p:cNvPr id="5" name="Slide Number 5"/>
+          <p:cNvSpPr txBox="1"/>
+          <p:nvPr/>
+        </p:nvSpPr>
+        <p:spPr>
+          <a:xfrm>
+            <a:off x="11277295" y="6611112"/>
+            <a:ext cx="685800" cy="201168"/>
+          </a:xfrm>
+          <a:prstGeom prst="rect">
+            <a:avLst/>
+          </a:prstGeom>
+          <a:noFill/>
+        </p:spPr>
+        <p:txBody>
+          <a:bodyPr wrap="none" lIns="0" tIns="0" rIns="0" bIns="0" anchor="b">
+            <a:noAutofit/>
+          </a:bodyPr>
+          <a:lstStyle/>
+          <a:p>
+            <a:pPr algn="r"/>
+            <a:fld id="{5C1A6E0B-3B1F-4D5E-9C7A-2F4B8D6E1A90}" type="slidenum">
+              <a:rPr lang="en-US" sz="1200" dirty="0">
+                <a:solidFill>
+                  <a:srgbClr val="5F6272"/>
+                </a:solidFill>
+              </a:rPr>
+              <a:t>9</a:t>
+            </a:fld>
           </a:p>
         </p:txBody>
       </p:sp>

--- a/Module 2 topic 2/t2-lesson3-perpendicular-slopes-catchup.pptx
+++ b/Module 2 topic 2/t2-lesson3-perpendicular-slopes-catchup.pptx
@@ -721,7 +721,7 @@
           <a:p>
             <a:r>
               <a:rPr lang="en-US" dirty="0"/>
-              <a:t>Added for this deck; not from the textbook. Have this up as students walk in; they work silently while you take attendance (about 5 minutes). The same 4 questions are on the online Day 2 bell work. Reveal the answers one at a time. Answer key: 1. Perpendicular slopes are negative reciprocals: ⅔ · (−3/2) = −1. 2. On a horizontal line y never changes, so the rise is 0. 3. Every point on a vertical line has the same x-value, here 2. 4. Negative reciprocals multiply to −1.</a:t>
+              <a:t>Added for this deck; not from the textbook. Have this up as students walk in; they work silently while you take attendance (about 5 minutes). The same 4 questions are on the online Day 2 bell work. Reveal the answers one at a time. Answer key: 1. Perpendicular slopes are negative reciprocals: ⅔ · (−3/2) = −1. 2. On a horizontal line y never changes, so the rise is 0. 3. Every point on a vertical line has the same x-value, here 2. 4. Perpendicular slope: −½. Put in the point: 1 = −½(4) + b = −2 + b, so b = 3.</a:t>
             </a:r>
           </a:p>
         </p:txBody>
@@ -1488,7 +1488,7 @@
           <a:p>
             <a:r>
               <a:rPr lang="en-US" dirty="0"/>
-              <a:t>Added for this deck; not from the textbook. Have this up as students walk in; they work silently while you take attendance (about 5 minutes). The same 4 questions are on the online Day 1 bell work. Reveal the answers one at a time. Answer key: 1. Flip the fraction: ⅔ · 3/2 = 1. 2. A 90° counterclockwise rotation maps (x, y) to (−y, x). 3. Slope = (5 − 0) ÷ (8 − 0) = 5/8. 4. In y = mx + b, m = −3.</a:t>
+              <a:t>Added for this deck; not from the textbook. Have this up as students walk in; they work silently while you take attendance (about 5 minutes). The same 4 questions are on the online Day 1 bell work. Reveal the answers one at a time. Answer key: 1. Flip the fraction: ⅔ · 3/2 = 1. 2. A 90° counterclockwise rotation maps (x, y) to (−y, x). 3. Slope = (5 − 0) ÷ (8 − 0) = 5/8. 4. Slope = (−2 − 4) ÷ (2 − (−1)) = −6 ÷ 3 = −2.</a:t>
             </a:r>
           </a:p>
         </p:txBody>
@@ -15631,7 +15631,77 @@
                 <a:latin typeface="Segoe UI"/>
                 <a:cs typeface="Segoe UI"/>
               </a:rPr>
-              <a:t xml:space="preserve">4. What is the product of the slopes of two perpendicular lines (neither vertical)? </a:t>
+              <a:t xml:space="preserve">4. Which equation represents a line perpendicular to </a:t>
+            </a:r>
+            <a:r>
+              <a:rPr lang="en-US" sz="1950" dirty="0" i="1">
+                <a:solidFill>
+                  <a:srgbClr val="16171D"/>
+                </a:solidFill>
+                <a:latin typeface="Cambria"/>
+                <a:cs typeface="Cambria"/>
+              </a:rPr>
+              <a:t xml:space="preserve">y</a:t>
+            </a:r>
+            <a:r>
+              <a:rPr lang="en-US" sz="1950" dirty="0">
+                <a:solidFill>
+                  <a:srgbClr val="16171D"/>
+                </a:solidFill>
+                <a:latin typeface="Cambria"/>
+                <a:cs typeface="Cambria"/>
+              </a:rPr>
+              <a:t xml:space="preserve"> = 2</a:t>
+            </a:r>
+            <a:r>
+              <a:rPr lang="en-US" sz="1950" dirty="0" i="1">
+                <a:solidFill>
+                  <a:srgbClr val="16171D"/>
+                </a:solidFill>
+                <a:latin typeface="Cambria"/>
+                <a:cs typeface="Cambria"/>
+              </a:rPr>
+              <a:t xml:space="preserve">x</a:t>
+            </a:r>
+            <a:r>
+              <a:rPr lang="en-US" sz="1950" dirty="0">
+                <a:solidFill>
+                  <a:srgbClr val="16171D"/>
+                </a:solidFill>
+                <a:latin typeface="Cambria"/>
+                <a:cs typeface="Cambria"/>
+              </a:rPr>
+              <a:t xml:space="preserve"> + 3</a:t>
+            </a:r>
+            <a:r>
+              <a:rPr lang="en-US" sz="1950" dirty="0">
+                <a:solidFill>
+                  <a:srgbClr val="16171D"/>
+                </a:solidFill>
+                <a:latin typeface="Segoe UI"/>
+                <a:cs typeface="Segoe UI"/>
+              </a:rPr>
+              <a:t xml:space="preserve"> that passes through the point </a:t>
+            </a:r>
+            <a:r>
+              <a:rPr lang="en-US" sz="1950" dirty="0">
+                <a:solidFill>
+                  <a:srgbClr val="16171D"/>
+                </a:solidFill>
+                <a:latin typeface="Cambria"/>
+                <a:cs typeface="Cambria"/>
+              </a:rPr>
+              <a:t xml:space="preserve">(4, 1)</a:t>
+            </a:r>
+            <a:r>
+              <a:rPr lang="en-US" sz="1950" dirty="0">
+                <a:solidFill>
+                  <a:srgbClr val="16171D"/>
+                </a:solidFill>
+                <a:latin typeface="Segoe UI"/>
+                <a:cs typeface="Segoe UI"/>
+              </a:rPr>
+              <a:t xml:space="preserve">? </a:t>
             </a:r>
             <a:r>
               <a:rPr lang="en-US" sz="1575" dirty="0">
@@ -15641,7 +15711,7 @@
                 <a:latin typeface="Segoe UI"/>
                 <a:cs typeface="Segoe UI"/>
               </a:rPr>
-              <a:t xml:space="preserve">(SE p. 308)</a:t>
+              <a:t xml:space="preserve">(SE p. 312)</a:t>
             </a:r>
             <a:endParaRPr lang="en-US" sz="1950" dirty="0"/>
           </a:p>
@@ -15656,7 +15726,7 @@
         <p:spPr>
           <a:xfrm>
             <a:off x="6362548" y="4323588"/>
-            <a:ext cx="2244715" cy="518922"/>
+            <a:ext cx="3737153" cy="518922"/>
           </a:xfrm>
           <a:prstGeom prst="roundRect">
             <a:avLst>
@@ -15692,14 +15762,44 @@
               <a:t xml:space="preserve">ANSWER   </a:t>
             </a:r>
             <a:r>
-              <a:rPr lang="en-US" sz="2325" dirty="0">
+              <a:rPr lang="en-US" sz="2325" dirty="0" i="1">
                 <a:solidFill>
                   <a:srgbClr val="16171D"/>
                 </a:solidFill>
                 <a:latin typeface="Cambria"/>
                 <a:cs typeface="Cambria"/>
               </a:rPr>
-              <a:t xml:space="preserve">−1</a:t>
+              <a:t xml:space="preserve">y</a:t>
+            </a:r>
+            <a:r>
+              <a:rPr lang="en-US" sz="2325" dirty="0">
+                <a:solidFill>
+                  <a:srgbClr val="16171D"/>
+                </a:solidFill>
+                <a:latin typeface="Cambria"/>
+                <a:cs typeface="Cambria"/>
+              </a:rPr>
+              <a:t xml:space="preserve"> = −½</a:t>
+            </a:r>
+            <a:r>
+              <a:rPr lang="en-US" sz="2325" dirty="0" i="1">
+                <a:solidFill>
+                  <a:srgbClr val="16171D"/>
+                </a:solidFill>
+                <a:latin typeface="Cambria"/>
+                <a:cs typeface="Cambria"/>
+              </a:rPr>
+              <a:t xml:space="preserve">x</a:t>
+            </a:r>
+            <a:r>
+              <a:rPr lang="en-US" sz="2325" dirty="0">
+                <a:solidFill>
+                  <a:srgbClr val="16171D"/>
+                </a:solidFill>
+                <a:latin typeface="Cambria"/>
+                <a:cs typeface="Cambria"/>
+              </a:rPr>
+              <a:t xml:space="preserve"> + 3</a:t>
             </a:r>
             <a:endParaRPr lang="en-US" sz="2325" dirty="0"/>
           </a:p>
@@ -34932,7 +35032,7 @@
         <p:spPr>
           <a:xfrm>
             <a:off x="6362548" y="3243834"/>
-            <a:ext cx="5143348" cy="352044"/>
+            <a:ext cx="5143348" cy="946404"/>
           </a:xfrm>
           <a:prstGeom prst="rect">
             <a:avLst/>
@@ -34961,17 +35061,27 @@
                 <a:latin typeface="Segoe UI"/>
                 <a:cs typeface="Segoe UI"/>
               </a:rPr>
-              <a:t xml:space="preserve">4. What is the slope of </a:t>
-            </a:r>
-            <a:r>
-              <a:rPr lang="en-US" sz="1950" dirty="0" i="1">
+              <a:t xml:space="preserve">4. A line passes through the points </a:t>
+            </a:r>
+            <a:r>
+              <a:rPr lang="en-US" sz="1950" dirty="0">
                 <a:solidFill>
                   <a:srgbClr val="16171D"/>
                 </a:solidFill>
                 <a:latin typeface="Cambria"/>
                 <a:cs typeface="Cambria"/>
               </a:rPr>
-              <a:t xml:space="preserve">y</a:t>
+              <a:t xml:space="preserve">(−1, 4)</a:t>
+            </a:r>
+            <a:r>
+              <a:rPr lang="en-US" sz="1950" dirty="0">
+                <a:solidFill>
+                  <a:srgbClr val="16171D"/>
+                </a:solidFill>
+                <a:latin typeface="Segoe UI"/>
+                <a:cs typeface="Segoe UI"/>
+              </a:rPr>
+              <a:t xml:space="preserve"> and </a:t>
             </a:r>
             <a:r>
               <a:rPr lang="en-US" sz="1950" dirty="0">
@@ -34981,37 +35091,17 @@
                 <a:latin typeface="Cambria"/>
                 <a:cs typeface="Cambria"/>
               </a:rPr>
-              <a:t xml:space="preserve"> = −3</a:t>
-            </a:r>
-            <a:r>
-              <a:rPr lang="en-US" sz="1950" dirty="0" i="1">
-                <a:solidFill>
-                  <a:srgbClr val="16171D"/>
-                </a:solidFill>
-                <a:latin typeface="Cambria"/>
-                <a:cs typeface="Cambria"/>
-              </a:rPr>
-              <a:t xml:space="preserve">x</a:t>
+              <a:t xml:space="preserve">(2, −2)</a:t>
             </a:r>
             <a:r>
               <a:rPr lang="en-US" sz="1950" dirty="0">
                 <a:solidFill>
                   <a:srgbClr val="16171D"/>
                 </a:solidFill>
-                <a:latin typeface="Cambria"/>
-                <a:cs typeface="Cambria"/>
-              </a:rPr>
-              <a:t xml:space="preserve"> + 5</a:t>
-            </a:r>
-            <a:r>
-              <a:rPr lang="en-US" sz="1950" dirty="0">
-                <a:solidFill>
-                  <a:srgbClr val="16171D"/>
-                </a:solidFill>
-                <a:latin typeface="Segoe UI"/>
-                <a:cs typeface="Segoe UI"/>
-              </a:rPr>
-              <a:t xml:space="preserve">?</a:t>
+                <a:latin typeface="Segoe UI"/>
+                <a:cs typeface="Segoe UI"/>
+              </a:rPr>
+              <a:t xml:space="preserve">. What is the slope of the line?</a:t>
             </a:r>
             <a:endParaRPr lang="en-US" sz="1950" dirty="0"/>
           </a:p>
@@ -35025,7 +35115,7 @@
         </p:nvSpPr>
         <p:spPr>
           <a:xfrm>
-            <a:off x="6362548" y="3729228"/>
+            <a:off x="6362548" y="4323588"/>
             <a:ext cx="2244715" cy="518922"/>
           </a:xfrm>
           <a:prstGeom prst="roundRect">
@@ -35069,7 +35159,7 @@
                 <a:latin typeface="Cambria"/>
                 <a:cs typeface="Cambria"/>
               </a:rPr>
-              <a:t xml:space="preserve">−3</a:t>
+              <a:t xml:space="preserve">−2</a:t>
             </a:r>
             <a:endParaRPr lang="en-US" sz="2325" dirty="0"/>
           </a:p>

--- a/Module 2 topic 2/t2-lesson3-perpendicular-slopes-catchup.pptx
+++ b/Module 2 topic 2/t2-lesson3-perpendicular-slopes-catchup.pptx
@@ -603,7 +603,7 @@
           <a:p>
             <a:r>
               <a:rPr lang="en-US" dirty="0"/>
-              <a:t>Class ends here on Thursday, October 29.</a:t>
+              <a:t>Class ends here on Wednesday, October 28.</a:t>
             </a:r>
           </a:p>
         </p:txBody>
@@ -662,7 +662,7 @@
           <a:p>
             <a:r>
               <a:rPr lang="en-US" dirty="0"/>
-              <a:t>Class starts here on Monday, November 2.</a:t>
+              <a:t>Class starts here on Thursday, October 29.</a:t>
             </a:r>
           </a:p>
         </p:txBody>
@@ -839,7 +839,7 @@
           <a:p>
             <a:r>
               <a:rPr lang="en-US" dirty="0"/>
-              <a:t>Class starts here on Thursday, October 29.</a:t>
+              <a:t>Class starts here on Wednesday, October 28.</a:t>
             </a:r>
           </a:p>
         </p:txBody>
@@ -1606,7 +1606,7 @@
           <a:p>
             <a:r>
               <a:rPr lang="en-US" dirty="0"/>
-              <a:t>Class ends here on Monday, November 2.</a:t>
+              <a:t>Class ends here on Thursday, October 29.</a:t>
             </a:r>
           </a:p>
         </p:txBody>
@@ -2544,7 +2544,7 @@
                 <a:latin typeface="Segoe UI"/>
                 <a:cs typeface="Segoe UI"/>
               </a:rPr>
-              <a:t xml:space="preserve">Adds a 15-minute Topic 1 Catch-Up (Lessons 5–6) each day · Day 1: Thu, Oct 29 · Day 2: Mon, Nov 2</a:t>
+              <a:t xml:space="preserve">Adds a 15-minute Topic 1 Catch-Up (Lessons 5–6) each day · Day 1: Wed, Oct 28 · Day 2: Thu, Oct 29</a:t>
             </a:r>
             <a:endParaRPr lang="en-US" sz="1650" dirty="0"/>
           </a:p>
@@ -8472,7 +8472,7 @@
                 <a:latin typeface="Segoe UI"/>
                 <a:cs typeface="Segoe UI"/>
               </a:rPr>
-              <a:t xml:space="preserve">Day 1 · Activity 3.1 · Slopes of Perpendicular Lines · SE p. 307</a:t>
+              <a:t xml:space="preserve">Day 1 · Activity 3.1 · Slopes of Perpendicular Lines · SE p. 307 · ★ Essential</a:t>
             </a:r>
             <a:endParaRPr lang="en-US" sz="1200" dirty="0"/>
           </a:p>
@@ -10312,7 +10312,7 @@
                 <a:latin typeface="Segoe UI"/>
                 <a:cs typeface="Segoe UI"/>
               </a:rPr>
-              <a:t xml:space="preserve">Day 1 · Activity 3.1 · Worked Example · SE p. 308</a:t>
+              <a:t xml:space="preserve">Day 1 · Activity 3.1 · Worked Example · SE p. 308 · ★ Essential</a:t>
             </a:r>
             <a:endParaRPr lang="en-US" sz="1200" dirty="0"/>
           </a:p>
@@ -13430,7 +13430,7 @@
                 <a:latin typeface="Segoe UI"/>
                 <a:cs typeface="Segoe UI"/>
               </a:rPr>
-              <a:t xml:space="preserve">Day 1 · Activity 3.1 · Question 4 · SE p. 309</a:t>
+              <a:t xml:space="preserve">Day 1 · Activity 3.1 · Question 4 · SE p. 309 · ★ Essential</a:t>
             </a:r>
             <a:endParaRPr lang="en-US" sz="1200" dirty="0"/>
           </a:p>
@@ -14580,7 +14580,7 @@
                 <a:latin typeface="Segoe UI"/>
                 <a:cs typeface="Segoe UI"/>
               </a:rPr>
-              <a:t xml:space="preserve">Stop here: Thursday, October 29</a:t>
+              <a:t xml:space="preserve">Stop here: Wednesday, October 28</a:t>
             </a:r>
             <a:endParaRPr lang="en-US" sz="8250" dirty="0"/>
           </a:p>
@@ -14624,7 +14624,7 @@
                 <a:latin typeface="Segoe UI"/>
                 <a:cs typeface="Segoe UI"/>
               </a:rPr>
-              <a:t xml:space="preserve">Next class: Monday, November 2. Start at the next slide, “Start: Monday, November 2.”</a:t>
+              <a:t xml:space="preserve">Next class: Thursday, October 29. Start at the next slide, “Start: Thursday, October 29.”</a:t>
             </a:r>
             <a:endParaRPr lang="en-US" sz="2250" dirty="0"/>
           </a:p>
@@ -14774,7 +14774,7 @@
                 <a:latin typeface="Segoe UI"/>
                 <a:cs typeface="Segoe UI"/>
               </a:rPr>
-              <a:t xml:space="preserve">Start: Monday, November 2</a:t>
+              <a:t xml:space="preserve">Start: Thursday, October 29</a:t>
             </a:r>
             <a:endParaRPr lang="en-US" sz="5700" dirty="0"/>
           </a:p>
@@ -15097,7 +15097,7 @@
                 <a:latin typeface="Segoe UI"/>
                 <a:cs typeface="Segoe UI"/>
               </a:rPr>
-              <a:t xml:space="preserve">Day 2 · Bell Work · Review of Day 1 · Mon, Nov 2</a:t>
+              <a:t xml:space="preserve">Day 2 · Bell Work · Review of Day 1 · Thu, Oct 29</a:t>
             </a:r>
             <a:endParaRPr lang="en-US" sz="1200" dirty="0"/>
           </a:p>
@@ -16331,7 +16331,7 @@
                 <a:latin typeface="Segoe UI"/>
                 <a:cs typeface="Segoe UI"/>
               </a:rPr>
-              <a:t xml:space="preserve">Topic 1 Catch-Up · Mon, Nov 2 · about 15 minutes</a:t>
+              <a:t xml:space="preserve">Topic 1 Catch-Up · Thu, Oct 29 · about 15 minutes</a:t>
             </a:r>
             <a:endParaRPr lang="en-US" sz="1200" dirty="0"/>
           </a:p>
@@ -16645,7 +16645,7 @@
                 <a:latin typeface="Segoe UI"/>
                 <a:cs typeface="Segoe UI"/>
               </a:rPr>
-              <a:t xml:space="preserve">Start: Thursday, October 29</a:t>
+              <a:t xml:space="preserve">Start: Wednesday, October 28</a:t>
             </a:r>
             <a:endParaRPr lang="en-US" sz="8250" dirty="0"/>
           </a:p>
@@ -24970,7 +24970,7 @@
                 <a:latin typeface="Segoe UI"/>
                 <a:cs typeface="Segoe UI"/>
               </a:rPr>
-              <a:t xml:space="preserve">Day 2 · Activity 3.2 · Horizontal and Vertical Lines · SE pp. 310–311</a:t>
+              <a:t xml:space="preserve">Day 2 · Activity 3.2 · Horizontal and Vertical Lines · SE pp. 310–311 · ★ Essential</a:t>
             </a:r>
             <a:endParaRPr lang="en-US" sz="1200" dirty="0"/>
           </a:p>
@@ -28491,7 +28491,7 @@
                 <a:latin typeface="Segoe UI"/>
                 <a:cs typeface="Segoe UI"/>
               </a:rPr>
-              <a:t xml:space="preserve">Day 2 · Activity 3.2 · Questions 6–10 · SE p. 311</a:t>
+              <a:t xml:space="preserve">Day 2 · Activity 3.2 · Questions 6–10 · SE p. 311 · ★ Essential</a:t>
             </a:r>
             <a:endParaRPr lang="en-US" sz="1200" dirty="0"/>
           </a:p>
@@ -30065,7 +30065,7 @@
                 <a:latin typeface="Segoe UI"/>
                 <a:cs typeface="Segoe UI"/>
               </a:rPr>
-              <a:t xml:space="preserve">Day 2 · Activity 3.3 · Writing Equations of Perpendicular Lines · SE p. 312</a:t>
+              <a:t xml:space="preserve">Day 2 · Activity 3.3 · Writing Equations of Perpendicular Lines · SE p. 312 · ★ Essential</a:t>
             </a:r>
             <a:endParaRPr lang="en-US" sz="1200" dirty="0"/>
           </a:p>
@@ -31223,7 +31223,7 @@
                 <a:latin typeface="Segoe UI"/>
                 <a:cs typeface="Segoe UI"/>
               </a:rPr>
-              <a:t xml:space="preserve">Day 2 · Activity 3.3 · Questions 3–5 · SE pp. 312–313</a:t>
+              <a:t xml:space="preserve">Day 2 · Activity 3.3 · Questions 3–5 · SE pp. 312–313 · ★ Essential</a:t>
             </a:r>
             <a:endParaRPr lang="en-US" sz="1200" dirty="0"/>
           </a:p>
@@ -34567,7 +34567,7 @@
                 <a:latin typeface="Segoe UI"/>
                 <a:cs typeface="Segoe UI"/>
               </a:rPr>
-              <a:t xml:space="preserve">Day 1 · Bell Work · Review · Thu, Oct 29</a:t>
+              <a:t xml:space="preserve">Day 1 · Bell Work · Review · Wed, Oct 28</a:t>
             </a:r>
             <a:endParaRPr lang="en-US" sz="1200" dirty="0"/>
           </a:p>
@@ -36668,7 +36668,7 @@
                 <a:latin typeface="Segoe UI"/>
                 <a:cs typeface="Segoe UI"/>
               </a:rPr>
-              <a:t xml:space="preserve">Stop here: Monday, November 2</a:t>
+              <a:t xml:space="preserve">Stop here: Thursday, October 29</a:t>
             </a:r>
             <a:endParaRPr lang="en-US" sz="8250" dirty="0"/>
           </a:p>
@@ -36683,7 +36683,7 @@
         <p:spPr>
           <a:xfrm>
             <a:off x="685800" y="5253228"/>
-            <a:ext cx="10820095" cy="397764"/>
+            <a:ext cx="10820095" cy="740664"/>
           </a:xfrm>
           <a:prstGeom prst="rect">
             <a:avLst/>
@@ -36712,7 +36712,7 @@
                 <a:latin typeface="Segoe UI"/>
                 <a:cs typeface="Segoe UI"/>
               </a:rPr>
-              <a:t xml:space="preserve">Next class: Tuesday, November 3. Open the Lesson 4 deck.</a:t>
+              <a:t xml:space="preserve">Next class: Monday, November 2. Topic 2 Review: Lesson 4 in brief, then the online practice test. Tonight: the Lesson 3 quiz as homework.</a:t>
             </a:r>
             <a:endParaRPr lang="en-US" sz="2250" dirty="0"/>
           </a:p>
@@ -38448,7 +38448,7 @@
                 <a:latin typeface="Segoe UI"/>
                 <a:cs typeface="Segoe UI"/>
               </a:rPr>
-              <a:t xml:space="preserve">Topic 1 Catch-Up · Thu, Oct 29 · about 15 minutes</a:t>
+              <a:t xml:space="preserve">Topic 1 Catch-Up · Wed, Oct 28 · about 15 minutes</a:t>
             </a:r>
             <a:endParaRPr lang="en-US" sz="1200" dirty="0"/>
           </a:p>

--- a/Module 2 topic 2/t2-lesson3-perpendicular-slopes-catchup.pptx
+++ b/Module 2 topic 2/t2-lesson3-perpendicular-slopes-catchup.pptx
@@ -603,7 +603,7 @@
           <a:p>
             <a:r>
               <a:rPr lang="en-US" dirty="0"/>
-              <a:t>Class ends here on Wednesday, October 28.</a:t>
+              <a:t>Class ends here on Tuesday, October 27.</a:t>
             </a:r>
           </a:p>
         </p:txBody>
@@ -662,7 +662,7 @@
           <a:p>
             <a:r>
               <a:rPr lang="en-US" dirty="0"/>
-              <a:t>Class starts here on Thursday, October 29.</a:t>
+              <a:t>Class starts here on Wednesday, October 28.</a:t>
             </a:r>
           </a:p>
         </p:txBody>
@@ -839,7 +839,7 @@
           <a:p>
             <a:r>
               <a:rPr lang="en-US" dirty="0"/>
-              <a:t>Class starts here on Wednesday, October 28.</a:t>
+              <a:t>Class starts here on Tuesday, October 27.</a:t>
             </a:r>
           </a:p>
         </p:txBody>
@@ -1606,7 +1606,7 @@
           <a:p>
             <a:r>
               <a:rPr lang="en-US" dirty="0"/>
-              <a:t>Class ends here on Thursday, October 29.</a:t>
+              <a:t>Class ends here on Wednesday, October 28.</a:t>
             </a:r>
           </a:p>
         </p:txBody>
@@ -2544,7 +2544,7 @@
                 <a:latin typeface="Segoe UI"/>
                 <a:cs typeface="Segoe UI"/>
               </a:rPr>
-              <a:t xml:space="preserve">Adds a 15-minute Topic 1 Catch-Up (Lessons 5–6) each day · Day 1: Wed, Oct 28 · Day 2: Thu, Oct 29</a:t>
+              <a:t xml:space="preserve">Adds a 15-minute Topic 1 Catch-Up (Lessons 5–6) each day · Day 1: Tue, Oct 27 · Day 2: Wed, Oct 28</a:t>
             </a:r>
             <a:endParaRPr lang="en-US" sz="1650" dirty="0"/>
           </a:p>
@@ -14580,7 +14580,7 @@
                 <a:latin typeface="Segoe UI"/>
                 <a:cs typeface="Segoe UI"/>
               </a:rPr>
-              <a:t xml:space="preserve">Stop here: Wednesday, October 28</a:t>
+              <a:t xml:space="preserve">Stop here: Tuesday, October 27</a:t>
             </a:r>
             <a:endParaRPr lang="en-US" sz="8250" dirty="0"/>
           </a:p>
@@ -14624,7 +14624,7 @@
                 <a:latin typeface="Segoe UI"/>
                 <a:cs typeface="Segoe UI"/>
               </a:rPr>
-              <a:t xml:space="preserve">Next class: Thursday, October 29. Start at the next slide, “Start: Thursday, October 29.”</a:t>
+              <a:t xml:space="preserve">Next class: Wednesday, October 28. Start at the next slide, “Start: Wednesday, October 28.”</a:t>
             </a:r>
             <a:endParaRPr lang="en-US" sz="2250" dirty="0"/>
           </a:p>
@@ -14774,7 +14774,7 @@
                 <a:latin typeface="Segoe UI"/>
                 <a:cs typeface="Segoe UI"/>
               </a:rPr>
-              <a:t xml:space="preserve">Start: Thursday, October 29</a:t>
+              <a:t xml:space="preserve">Start: Wednesday, October 28</a:t>
             </a:r>
             <a:endParaRPr lang="en-US" sz="5700" dirty="0"/>
           </a:p>
@@ -15097,7 +15097,7 @@
                 <a:latin typeface="Segoe UI"/>
                 <a:cs typeface="Segoe UI"/>
               </a:rPr>
-              <a:t xml:space="preserve">Day 2 · Bell Work · Review of Day 1 · Thu, Oct 29</a:t>
+              <a:t xml:space="preserve">Day 2 · Bell Work · Review of Day 1 · Wed, Oct 28</a:t>
             </a:r>
             <a:endParaRPr lang="en-US" sz="1200" dirty="0"/>
           </a:p>
@@ -16331,7 +16331,7 @@
                 <a:latin typeface="Segoe UI"/>
                 <a:cs typeface="Segoe UI"/>
               </a:rPr>
-              <a:t xml:space="preserve">Topic 1 Catch-Up · Thu, Oct 29 · about 15 minutes</a:t>
+              <a:t xml:space="preserve">Topic 1 Catch-Up · Wed, Oct 28 · about 15 minutes</a:t>
             </a:r>
             <a:endParaRPr lang="en-US" sz="1200" dirty="0"/>
           </a:p>
@@ -16645,7 +16645,7 @@
                 <a:latin typeface="Segoe UI"/>
                 <a:cs typeface="Segoe UI"/>
               </a:rPr>
-              <a:t xml:space="preserve">Start: Wednesday, October 28</a:t>
+              <a:t xml:space="preserve">Start: Tuesday, October 27</a:t>
             </a:r>
             <a:endParaRPr lang="en-US" sz="8250" dirty="0"/>
           </a:p>
@@ -34567,7 +34567,7 @@
                 <a:latin typeface="Segoe UI"/>
                 <a:cs typeface="Segoe UI"/>
               </a:rPr>
-              <a:t xml:space="preserve">Day 1 · Bell Work · Review · Wed, Oct 28</a:t>
+              <a:t xml:space="preserve">Day 1 · Bell Work · Review · Tue, Oct 27</a:t>
             </a:r>
             <a:endParaRPr lang="en-US" sz="1200" dirty="0"/>
           </a:p>
@@ -36668,7 +36668,7 @@
                 <a:latin typeface="Segoe UI"/>
                 <a:cs typeface="Segoe UI"/>
               </a:rPr>
-              <a:t xml:space="preserve">Stop here: Thursday, October 29</a:t>
+              <a:t xml:space="preserve">Stop here: Wednesday, October 28</a:t>
             </a:r>
             <a:endParaRPr lang="en-US" sz="8250" dirty="0"/>
           </a:p>
@@ -36712,7 +36712,7 @@
                 <a:latin typeface="Segoe UI"/>
                 <a:cs typeface="Segoe UI"/>
               </a:rPr>
-              <a:t xml:space="preserve">Next class: Monday, November 2. Topic 2 Review: Lesson 4 in brief, then the online practice test. Tonight: the Lesson 3 quiz as homework.</a:t>
+              <a:t xml:space="preserve">Next class: Thursday, October 29. Lesson 4 in one day: open the Lesson 4 deck. Tonight: the Lesson 3 quiz as homework.</a:t>
             </a:r>
             <a:endParaRPr lang="en-US" sz="2250" dirty="0"/>
           </a:p>
@@ -38448,7 +38448,7 @@
                 <a:latin typeface="Segoe UI"/>
                 <a:cs typeface="Segoe UI"/>
               </a:rPr>
-              <a:t xml:space="preserve">Topic 1 Catch-Up · Wed, Oct 28 · about 15 minutes</a:t>
+              <a:t xml:space="preserve">Topic 1 Catch-Up · Tue, Oct 27 · about 15 minutes</a:t>
             </a:r>
             <a:endParaRPr lang="en-US" sz="1200" dirty="0"/>
           </a:p>
